--- a/stub_validation_channel1_timeline_apple.pptx
+++ b/stub_validation_channel1_timeline_apple.pptx
@@ -3643,7 +3643,7 @@
               </a:defRPr>
             </a:pPr>
             <a:r>
-              <a:t>苹果发布端侧AI计划，重点面向iPhone和Mac设备提供本地模型能力，公开材料显示该动作将影响系统体验、芯片算力需求和开发者应用适配节奏。</a:t>
+              <a:t>苹果发布端侧AI计划，重点面向iPhone和Mac提供本地模型能力。公开材料显示，该计划覆盖系统体验、开发者接口和设备端推理场景。报道提到芯片算力、隐私处理和应用适配会成为落地重点。该动作将影响后续系统升级节奏，也会提高终端硬件对AI能力的配置要求。供应链和开发者需要据此调整测试与适配安排。</a:t>
             </a:r>
           </a:p>
           <a:p>
@@ -3684,7 +3684,7 @@
               </a:defRPr>
             </a:pPr>
             <a:r>
-              <a:t>供应链消息称苹果调整新一代iPhone备货节奏，相关材料指向摄像头、显示模组和主板环节订单变化，直接影响上游零部件厂商排产安排。</a:t>
+              <a:t>供应链消息称苹果调整新一代iPhone备货节奏，涉及摄像头、显示模组和主板环节。公开材料指向部分零部件订单节奏变化，但未披露具体数量。该变化会影响上游厂商排产、库存和交付安排。对苹果而言，备货调整有助于匹配新品发布前后的需求预期，并减少发布初期供需错配风险。供应链企业需要根据后续订单确认生产窗口。</a:t>
             </a:r>
           </a:p>
           <a:p>
@@ -3714,7 +3714,7 @@
               </a:defRPr>
             </a:pPr>
             <a:r>
-              <a:t>苹果更新Mac芯片路线，公开信息显示新平台聚焦能效、图形性能和AI推理能力，可能推动高端笔记本换机需求并改变开发者优化重点。</a:t>
+              <a:t>苹果更新Mac芯片路线，公开信息显示新平台聚焦能效、图形性能和AI推理能力。材料提到高端笔记本和桌面设备会优先受益。该路线会改变开发者对本地推理、图形渲染和电池续航的优化重点，并影响专业软件生态的性能验证计划。对硬件业务而言，新芯片有助于强化Mac产品差异化。后续节点取决于具体机型发布安排。</a:t>
             </a:r>
           </a:p>
           <a:p>

--- a/stub_validation_channel1_timeline_apple.pptx
+++ b/stub_validation_channel1_timeline_apple.pptx
@@ -3636,14 +3636,38 @@
               <a:spcAft>
                 <a:spcPts val="400"/>
               </a:spcAft>
-              <a:defRPr sz="1000">
+              <a:defRPr sz="1100">
                 <a:solidFill>
-                  <a:srgbClr val="505050"/>
+                  <a:srgbClr val="1F4E79"/>
                 </a:solidFill>
               </a:defRPr>
             </a:pPr>
             <a:r>
               <a:t>苹果发布端侧AI计划，重点面向iPhone和Mac提供本地模型能力。公开材料显示，该计划覆盖系统体验、开发者接口和设备端推理场景。报道提到芯片算力、隐私处理和应用适配会成为落地重点。该动作将影响后续系统升级节奏，也会提高终端硬件对AI能力的配置要求。供应链和开发者需要据此调整测试与适配安排。</a:t>
+            </a:r>
+          </a:p>
+          <a:p>
+            <a:pPr>
+              <a:spcAft>
+                <a:spcPts val="400"/>
+              </a:spcAft>
+            </a:pPr>
+            <a:r>
+              <a:rPr sz="900">
+                <a:solidFill>
+                  <a:srgbClr val="0070C0"/>
+                </a:solidFill>
+              </a:rPr>
+              <a:t>🔗 原新闻：</a:t>
+            </a:r>
+            <a:r>
+              <a:rPr sz="900">
+                <a:solidFill>
+                  <a:srgbClr val="0070C0"/>
+                </a:solidFill>
+                <a:hlinkClick r:id="rId2"/>
+              </a:rPr>
+              <a:t>点击查看原文</a:t>
             </a:r>
           </a:p>
           <a:p>
@@ -3677,14 +3701,38 @@
               <a:spcAft>
                 <a:spcPts val="400"/>
               </a:spcAft>
-              <a:defRPr sz="1000">
+              <a:defRPr sz="1100">
                 <a:solidFill>
-                  <a:srgbClr val="505050"/>
+                  <a:srgbClr val="1F4E79"/>
                 </a:solidFill>
               </a:defRPr>
             </a:pPr>
             <a:r>
               <a:t>供应链消息称苹果调整新一代iPhone备货节奏，涉及摄像头、显示模组和主板环节。公开材料指向部分零部件订单节奏变化，但未披露具体数量。该变化会影响上游厂商排产、库存和交付安排。对苹果而言，备货调整有助于匹配新品发布前后的需求预期，并减少发布初期供需错配风险。供应链企业需要根据后续订单确认生产窗口。</a:t>
+            </a:r>
+          </a:p>
+          <a:p>
+            <a:pPr>
+              <a:spcAft>
+                <a:spcPts val="400"/>
+              </a:spcAft>
+            </a:pPr>
+            <a:r>
+              <a:rPr sz="900">
+                <a:solidFill>
+                  <a:srgbClr val="0070C0"/>
+                </a:solidFill>
+              </a:rPr>
+              <a:t>🔗 原新闻：</a:t>
+            </a:r>
+            <a:r>
+              <a:rPr sz="900">
+                <a:solidFill>
+                  <a:srgbClr val="0070C0"/>
+                </a:solidFill>
+                <a:hlinkClick r:id="rId3"/>
+              </a:rPr>
+              <a:t>点击查看原文</a:t>
             </a:r>
           </a:p>
           <a:p>
@@ -3707,14 +3755,38 @@
               <a:spcAft>
                 <a:spcPts val="400"/>
               </a:spcAft>
-              <a:defRPr sz="1000">
+              <a:defRPr sz="1100">
                 <a:solidFill>
-                  <a:srgbClr val="505050"/>
+                  <a:srgbClr val="1F4E79"/>
                 </a:solidFill>
               </a:defRPr>
             </a:pPr>
             <a:r>
               <a:t>苹果更新Mac芯片路线，公开信息显示新平台聚焦能效、图形性能和AI推理能力。材料提到高端笔记本和桌面设备会优先受益。该路线会改变开发者对本地推理、图形渲染和电池续航的优化重点，并影响专业软件生态的性能验证计划。对硬件业务而言，新芯片有助于强化Mac产品差异化。后续节点取决于具体机型发布安排。</a:t>
+            </a:r>
+          </a:p>
+          <a:p>
+            <a:pPr>
+              <a:spcAft>
+                <a:spcPts val="400"/>
+              </a:spcAft>
+            </a:pPr>
+            <a:r>
+              <a:rPr sz="900">
+                <a:solidFill>
+                  <a:srgbClr val="0070C0"/>
+                </a:solidFill>
+              </a:rPr>
+              <a:t>🔗 原新闻：</a:t>
+            </a:r>
+            <a:r>
+              <a:rPr sz="900">
+                <a:solidFill>
+                  <a:srgbClr val="0070C0"/>
+                </a:solidFill>
+                <a:hlinkClick r:id="rId4"/>
+              </a:rPr>
+              <a:t>点击查看原文</a:t>
             </a:r>
           </a:p>
           <a:p>
@@ -3820,14 +3892,38 @@
               <a:spcAft>
                 <a:spcPts val="400"/>
               </a:spcAft>
-              <a:defRPr sz="1000">
+              <a:defRPr sz="1100">
                 <a:solidFill>
-                  <a:srgbClr val="505050"/>
+                  <a:srgbClr val="1F4E79"/>
                 </a:solidFill>
               </a:defRPr>
             </a:pPr>
             <a:r>
               <a:t>公开材料暂未披露更多细节。</a:t>
+            </a:r>
+          </a:p>
+          <a:p>
+            <a:pPr>
+              <a:spcAft>
+                <a:spcPts val="400"/>
+              </a:spcAft>
+            </a:pPr>
+            <a:r>
+              <a:rPr sz="900">
+                <a:solidFill>
+                  <a:srgbClr val="0070C0"/>
+                </a:solidFill>
+              </a:rPr>
+              <a:t>🔗 原新闻：</a:t>
+            </a:r>
+            <a:r>
+              <a:rPr sz="900">
+                <a:solidFill>
+                  <a:srgbClr val="0070C0"/>
+                </a:solidFill>
+                <a:hlinkClick r:id="rId2"/>
+              </a:rPr>
+              <a:t>点击查看原文</a:t>
             </a:r>
           </a:p>
         </p:txBody>

--- a/stub_validation_channel1_timeline_apple.pptx
+++ b/stub_validation_channel1_timeline_apple.pptx
@@ -3541,7 +3541,7 @@
               <a:defRPr sz="1600"/>
             </a:pPr>
             <a:r>
-              <a:t>生成日期: 2026-06-05</a:t>
+              <a:t>生成日期: 2026-06-09</a:t>
             </a:r>
           </a:p>
         </p:txBody>
@@ -3643,7 +3643,7 @@
               </a:defRPr>
             </a:pPr>
             <a:r>
-              <a:t>苹果发布端侧AI计划，重点面向iPhone和Mac提供本地模型能力。公开材料显示，该计划覆盖系统体验、开发者接口和设备端推理场景。报道提到芯片算力、隐私处理和应用适配会成为落地重点。该动作将影响后续系统升级节奏，也会提高终端硬件对AI能力的配置要求。供应链和开发者需要据此调整测试与适配安排。</a:t>
+              <a:t>苹果在6月发布端侧AI计划，重点面向iPhone和Mac提供本地模型能力。该计划覆盖系统体验、开发者接口和设备端推理场景。报道提到芯片算力、隐私处理和应用适配会成为落地重点。该动作将影响后续系统升级节奏，也会提高终端硬件对AI能力的配置要求。供应链和开发者需要据此调整测试与适配安排。</a:t>
             </a:r>
           </a:p>
           <a:p>
@@ -3899,7 +3899,7 @@
               </a:defRPr>
             </a:pPr>
             <a:r>
-              <a:t>公开材料暂未披露更多细节。</a:t>
+              <a:t>苹果在6月调整Vision Pro渠道安排，相关动作涉及线下展示、零售培训和重点市场覆盖。报道没有披露具体门店数量，但指向体验式销售资源重新分配。渠道调整会影响消费者试用路径，也会改变开发者和内容合作方观察设备需求的节奏。后续销售表现将影响苹果对空间计算硬件的资源投入。</a:t>
             </a:r>
           </a:p>
           <a:p>

--- a/stub_validation_channel1_timeline_apple.pptx
+++ b/stub_validation_channel1_timeline_apple.pptx
@@ -3541,7 +3541,7 @@
               <a:defRPr sz="1600"/>
             </a:pPr>
             <a:r>
-              <a:t>生成日期: 2026-06-09</a:t>
+              <a:t>生成日期: 2026-09-07</a:t>
             </a:r>
           </a:p>
         </p:txBody>
@@ -3643,7 +3643,7 @@
               </a:defRPr>
             </a:pPr>
             <a:r>
-              <a:t>苹果在6月发布端侧AI计划，重点面向iPhone和Mac提供本地模型能力。该计划覆盖系统体验、开发者接口和设备端推理场景。报道提到芯片算力、隐私处理和应用适配会成为落地重点。该动作将影响后续系统升级节奏，也会提高终端硬件对AI能力的配置要求。供应链和开发者需要据此调整测试与适配安排。</a:t>
+              <a:t>苹果在6月发布端侧AI计划，重点面向iPhone和Mac提供本地模型能力。该计划覆盖系统体验、开发者接口和设备端推理场景。报道提到芯片算力、隐私处理和应用适配会成为落地重点。该动作将影响系统升级节奏，并促使供应链和开发者调整测试与适配安排。</a:t>
             </a:r>
           </a:p>
           <a:p>
@@ -3677,12 +3677,12 @@
               </a:spcAft>
               <a:defRPr sz="1000">
                 <a:solidFill>
-                  <a:srgbClr val="7C2D12"/>
+                  <a:srgbClr val="C06600"/>
                 </a:solidFill>
               </a:defRPr>
             </a:pPr>
             <a:r>
-              <a:t>  ↳ 详见后文：《苹果端侧AI计划推动设备体验升级》</a:t>
+              <a:t>  ↳ 详见后文：详细新闻 1《苹果端侧AI计划推动设备体验升级》</a:t>
             </a:r>
           </a:p>
           <a:p>
@@ -3708,7 +3708,7 @@
               </a:defRPr>
             </a:pPr>
             <a:r>
-              <a:t>供应链消息称苹果调整新一代iPhone备货节奏，涉及摄像头、显示模组和主板环节。公开材料指向部分零部件订单节奏变化，但未披露具体数量。该变化会影响上游厂商排产、库存和交付安排。对苹果而言，备货调整有助于匹配新品发布前后的需求预期，并减少发布初期供需错配风险。供应链企业需要根据后续订单确认生产窗口。</a:t>
+              <a:t>供应链消息称苹果调整新一代iPhone备货节奏，涉及摄像头、显示模组和主板环节。现有信息指向部分零部件订单节奏变化，但未披露具体数量。该变化会影响上游厂商排产、库存和交付安排。备货调整有助于匹配新品发布前后的需求预期，并减少发布初期供需错配风险。</a:t>
             </a:r>
           </a:p>
           <a:p>
@@ -3762,7 +3762,7 @@
               </a:defRPr>
             </a:pPr>
             <a:r>
-              <a:t>苹果更新Mac芯片路线，公开信息显示新平台聚焦能效、图形性能和AI推理能力。材料提到高端笔记本和桌面设备会优先受益。该路线会改变开发者对本地推理、图形渲染和电池续航的优化重点，并影响专业软件生态的性能验证计划。对硬件业务而言，新芯片有助于强化Mac产品差异化。后续节点取决于具体机型发布安排。</a:t>
+              <a:t>苹果更新Mac芯片路线，新平台聚焦能效、图形性能和AI推理能力。材料提到高端笔记本和桌面设备会优先采用该平台。该路线会改变开发者对本地推理、图形渲染和续航的优化重点，并影响专业软件的验证计划。新芯片也将强化Mac硬件差异化，后续节点取决于具体机型发布安排。</a:t>
             </a:r>
           </a:p>
           <a:p>
